--- a/examples/architecture.pptx
+++ b/examples/architecture.pptx
@@ -503,6 +503,7 @@
             <a:r>
               <a:rPr lang="en-US" dirty="0"/>
               <a:t>Created with Mermaid to Slides. Nodes and freeform lines are editable. Lines do not automatically reroute when nodes move.
+Slide direction: TB; selected mode: source; spacing: comfortable; source direction: TB.
 Mermaid source:
 flowchart TB
   A([Web client]) --&gt; B[API gateway]
